--- a/slide.pptx
+++ b/slide.pptx
@@ -427,6 +427,70 @@
 </inkml:ink>
 </file>
 
+<file path=ppt/ink/ink5.xml><?xml version="1.0" encoding="utf-8"?>
+<inkml:ink xmlns:inkml="http://www.w3.org/2003/InkML">
+  <inkml:definitions>
+    <inkml:context xml:id="ctx0">
+      <inkml:inkSource xml:id="inkSrc0">
+        <inkml:traceFormat>
+          <inkml:channel name="X" type="integer" min="-2.14748E9" max="2.14748E9" units="cm"/>
+          <inkml:channel name="Y" type="integer" min="-2.14748E9" max="2.14748E9" units="cm"/>
+          <inkml:channel name="F" type="integer" max="32767" units="dev"/>
+        </inkml:traceFormat>
+        <inkml:channelProperties>
+          <inkml:channelProperty channel="X" name="resolution" value="1000" units="1/cm"/>
+          <inkml:channelProperty channel="Y" name="resolution" value="1000" units="1/cm"/>
+          <inkml:channelProperty channel="F" name="resolution" value="0" units="1/dev"/>
+        </inkml:channelProperties>
+      </inkml:inkSource>
+      <inkml:timestamp xml:id="ts0" timeString="2026-03-25T13:42:44.966"/>
+    </inkml:context>
+    <inkml:brush xml:id="br0">
+      <inkml:brushProperty name="width" value="0.05292" units="cm"/>
+      <inkml:brushProperty name="height" value="0.05292" units="cm"/>
+      <inkml:brushProperty name="color" value="#FF0000"/>
+    </inkml:brush>
+  </inkml:definitions>
+  <inkml:trace contextRef="#ctx0" brushRef="#br0">3894 3066 13223,'-25'-42'1202,"1"-1"0,0 0 0,-2 6 0,-1 2 0,-4 8-471,-25 12 0,-2 10-1244,17 3 1,-1 5 711,-18 9 0,3 12-59,17 11 1,5 5-463,3-8 0,2 5 338,6 4 1,3 6 0,4 0-363,6-4 0,4 0 0,1 2 340,-2 14 1,2 3-1,2 1-25,3-14 0,3 1 1,1 0-1,2-1-52,5 14 1,3 0 0,6-4 5,2-7 1,6-2-1,3-6 32,3-7 0,3-4 1,5-7 66,7-7 1,6-7-1,-4-5 25,3 0 1,0-9 30,-7-7 1,2-7 0,-7-3-319,-2-13 0,-5-7 342,-5 6 1,-1-3 0,-2-2 5,-2-4 1,-2-3-1,-4 0-4,-2-3 1,-2-2 0,-3-1-19,-5 3 1,-2-1 0,-1-1 0,-2 4-69,0 0 1,-1 4 0,-3-3 16,-2-13 1,-3-3-1,-3 6 32,-6 6 1,-3 4-7,-7-7 1,-5 4 100,-6 11 0,-7 10-76,4 15 0,-5 6 0,2 3-44,-4 2 0,1 6 23,2 6 1,-2 4-1,6 4-46,6 7 1,4 4-14,-4 11 0,5 7-366,13-4 1,5 5 0,3 0 307,6-4 0,3 1 0,1-1 12,1 1 1,1 0 0,4-2-96,6-1 0,5-1 0,2-4-224,9 5 1,5-3-48,8 7 0,5-4 73,-13-17 1,3-3 0,-1-3 133,4-1 0,-2-3 316,-3-2 1,-5-6-106,2-18 757,-18-16-433,1-22-76,-9 15 1,0-1 61,-1-4 1,1 0 167,-2-6 0,0 2 2778,2-13-2792,-7 0 1095,-7 37-1387,-7 6-172,1 20 10,3 19-11,5 4-11,7 26-495,10-1 481,-2-20 0,3 1-84,10 5 0,3-1-118,-2-7 1,1-2 19,0-3 0,1-1-502,-1-4 1,-1-3-1756,13 7-3333,19 1 885,-8-21 1345,12-19 3556,-6-21 0,-9-2 0,-17 10 0,0-1 2030,-2-2 0,-2-1-689,-2 0 1,0-1-284,-3-2 1,-3 0 980,-4-14-1350,-10 13 616,-9 0 1176,-12 2-1909,5 8 436,-7-8-571,16 20 302,-2-5-240,6 7 68,0-1-359,3 6-124,3 7-40,0 3 29,5 16-11,-2 9-1739,-4 0 1,-1 1 1687,1 15-82,-3-7 0,2-1 83,7-1-7,1 6 18,17-20-12,2-15 34,22-7 11,-5-15 22,4-16 51,-14-13 3283,-12 4-3230,-13 5 0,-3-1 25,-2-12-90,-5 9 1,-2 2-73,-3-1 262,-7-1-307,5 26-257,1-1-309,8 11-851,10 7-1899,14 10 3316,17 11 0,-19-11 0,1-1 0</inkml:trace>
+  <inkml:trace contextRef="#ctx0" brushRef="#br0" timeOffset="977">5274 3530 26396,'-33'-1'34,"14"4"-18,53 15-21,-7-8-46,16-5 40,-14-14 22,4-8 17,-6-12 6,-10-21-23,-9 1 23,-9 0 22,-11 7 22,-5 19-16,-9 2-17,-4 12-6,-5 16-17,1 11-16,3 14 5,7 12-17,9 8-50,7 5-61,12 4-445,12-4 237,15-7-139,14-14-41,8-17 244,-18-15 1,-2-4 154,13-6 5,11-16 95,-29-6 68,3-13 50,-9-3 62,-8-2 89,-7 6 264,-5 2-354,-4 16 124,-4 5-123,0 14-118,-1 1-39,4 4 343,1 1-349,2 3 6,2 1-17,2 0 5,2-3 18,-1-1 27,-2-2 157,-2 0-190,0-3-23,-1 0 12,2-5 0,-1 2 10,4-7 1,-1 3 0,1-3 50,-1 1-39,-1 4 34,-2-2 27,0 3-16,-1 0-17,-1 2-11,0 1-17,-1 3-34,1-1 6,-1 3 6,0 8-6,-3 10 11,-2 16 6,0-3 0,0 3-6,0 23-17,0-25 1,5-1 10,19 27-10,-5-36 22,27 14-6,-2-31-14,-4-5 0,2-3 9,27-8 5,0-3 34,-15-13 22,-22-3 6,-3-12 11,-14-5 5,-19 0 12,-10 4-6,-10 6-61,6 12-17,0 5-68,17 12-66,3 1-174,19 10-415,14 5-543,18 7-829,12 4-197,-25-9 0,0-1-1837,2 0 1,1 0 4111,23 6 0,-21-6 0,-18-7 0</inkml:trace>
+  <inkml:trace contextRef="#ctx0" brushRef="#br0" timeOffset="1316">6431 3491 26732,'-46'-40'336,"8"16"-319,35 46 5,7 10-27,11 5 10,12-1-5,13-7-17,3-11 40,-1-14 5,-6-15-6,-4-13 12,-7-15 16,-7-9 51,-9-5 22,-10 2 23,-9 7 61,-7 10-17,-6 14-27,-5 11-12,-6 16-39,-3 15-73,5 5-22,7 5 0,2 4-26,9-6 1,1 2-423,-4 15 0,3 4 114,10-8 1,7 0-395,8-1 0,7-1-1076,8-3 0,7-3-3129,5-2 1,1-5 4206,-7-7 0,-1-3 0,10 5 1,-29-16-1</inkml:trace>
+  <inkml:trace contextRef="#ctx0" brushRef="#br0" timeOffset="1666">4187 4464 17641,'-59'14'935,"0"-1"1,-4 1 0,5-2 161,-1 1-295,16-3-24,65-12-504,15-4 1,11-2-191,2 0 0,6-1 0,4-1-916,-13 3 1,1 0 0,3-1 0,1 0-1,2 0 837,-2 1 1,2 0 0,1 0 0,1-1-1,1 1 1,0 0-208,-3 1 0,0 0 0,2-1 0,0 1 0,0 0 0,0 0 0,1 1 196,2-1 0,0 0 1,1 1-1,-1-1 1,1 1-1,0 0 0,0 0-221,-1 0 0,0 0 0,0 0 0,0 0 0,0 1 0,-1-1 0,0 0 183,7 0 0,-1 0 0,-1 0 0,0-1 0,-1 1 0,-1 0-224,-5 0 0,-1 1 0,0-1 0,-1 0 0,-1 1 0,-2-1 106,4 0 1,-2-1 0,-1 1 0,-1 0 0,-2-1 37,2 1 0,-1-1 0,-2 1 0,-3-1-752,2 1 1,-3-1-1,-4 1 1079,2-2 1,-6 0 0,-2 1 0,-23 2 0</inkml:trace>
+  <inkml:trace contextRef="#ctx0" brushRef="#br0" timeOffset="12292">13718 2551 14936,'-10'-42'1215,"-1"0"1,1 5-1,3 8-1299,7 21-73,0 8 415,2 19 84,3 15 0,0 10-245,-2 6 0,-1 7 0,1-1-1509,0-4 1,1-2-1,-2 3 1416,0-6 0,-2 2 1,0 1-1,-2 2 5,-1-2 0,-1 2 0,-1 1 0,-1 0 0,0-1-357,-1 7 0,-1-2 0,-1 2 0,0 3 339,1-7 1,-1 4-1,0 1 1,0 1 0,-1-1-1,1-4-298,-2 2 1,0-3 0,0 0-1,0-1 1,0-1 176,1-1 0,0-1 0,0 0 0,0-1 0,1-3-76,-3 14 1,1-3 0,1 1-673,0 1 0,2 1 1,3-3-1966,4-12 1,2-2 0,1-2 2842,-2 10 0,1-4 0,3-6 0,1-10 0,-1-21 0</inkml:trace>
+  <inkml:trace contextRef="#ctx0" brushRef="#br0" timeOffset="13041">13931 2268 7932,'52'6'218,"0"-1"1,0 0 0,0 0-1,0 0 1,-2 1 55,11 1 1,-1 0-1220,-16-2 1,2-2 0,1 0 1142,3 0 0,1-2 0,1 1-38,3-1 1,1 0-1,0 0-26,4 0 1,0-1-1,3 1-25,-4 0 1,4 0-1,-1 0 1,-4 0-81,0 0 1,-4 0 0,4 0-337,2 0 0,4 1 0,1 0 1,-6-1 326,0 0 1,-5 0-1,3 0-6,-5 0 0,3 0 0,0 0 0,0 0 59,-2 0 0,1-1 0,-1 1 0,-1 0-54,0 0 1,-1 0 0,-1 0-1,0 0 83,12 1 1,-1-1 0,1 1 173,1 1 1,0 0-1,-5 0-131,0 1 1,-4-1 114,8 2 1,-7 1 103,-11 1-4,-2 1 60,-18 1 1370,-9 3-1476,-3 4 2176,2 6-2334,2 7 1295,2 7-1244,-3 10-11,-3 10-478,-9-23 0,-1 2 340,-2 4 1,-1 1-17,-2 5 0,-2 1-8,-1 5 0,0 0-26,0-9 0,0 1 7,0 4 0,-1 5 0,2-2 4,1 9 1,0 1-753,1-2 1,-1 4-1,2-1 740,0-7 1,1 0 0,1 0 5,1 2 0,0 1 0,1 0-340,0 1 1,0 1-1,1 3 341,1-5 0,0 3 0,0 0 0,0-4-487,0 0 0,0-5 0,1 4 482,-1 1 1,0 3 0,0-1 0,-1-5 16,-1-5 0,0-5 1,-1 2-111,-2 8 1,0 2 0,-1-3 167,0 5 0,-4-2 263,-4-10 1,-3 1 0,-3-4-273,-5-2 1,-2-3-82,-2 9 1,-5-3-225,-16-5 1,-4-8-88,10-11 0,-3-3 134,2-2 0,-3 1 1,0-2 58,-16-1 1,0-2 103,-3-1 1,1-2-34,2-1 0,2 0-1348,4-1 1,4-1 1500,10 0 1,4-1 0,-5 1-1,23-2 1</inkml:trace>
+  <inkml:trace contextRef="#ctx0" brushRef="#br0" timeOffset="14525">13183 4701 14953,'23'-44'717,"0"1"0,-3 3 0,0 11-454,-5 24-6,0 9 63,-1 10 55,-6 13 39,-9 15-66,-10 14-468,1-24 0,-1 1 249,-2 3 0,0 0-29,0 2 1,1 0-28,1 1 0,2 1-26,2 0 1,2 0-9,1 0 0,2-1 9,2 0 0,2-1 13,1-1 1,1-1 5,1-2 0,2-1-99,9 26 172,3-8 17,4-5 67,6-7 61,9-3-10,17-7-189,-20-16 1,3-1-450,7-2 0,3-1 396,6 0 1,2 0-493,5-1 1,0-1 461,-18-1 1,1 0 0,-1-1 0,1 0 0,0 1 0,0-1 1,0 0 1,0 0 0,0 0 5,-1 0 0,0-1 0,0 0-6,19 1 1,0-1 0,-3-1 0,0 0 5,-3-1 0,0 0 0,-2-1 0,0-1-14,-1-1 1,-1 0-12,1-1 0,-1 0 16,1-1 1,-1-1 0,2 1 0,-1 0-17,1 1 0,-1-1 11,1 2 0,-1 0-11,-1 0 0,-1 1-44,-2 0 0,-1 0 64,-6 2 0,-1-1 14,-5 1 1,-3-1-16,19 5 723,-11-2-717,-7 0 1032,0-1-1043,4 0 22,8-2 1,9-1-6,9 2-15,-22-1 1,1 0-8,15 2-54,-18-2 0,-1 0-647,7 0-2403,10-5 3109,4-9 0,-29 6 0,-1-5 0</inkml:trace>
+  <inkml:trace contextRef="#ctx0" brushRef="#br0" timeOffset="19601">15835 3603 13043,'-11'-1'1607,"3"0"-1400,8 1-257,0 0 33,0-55 12,17 35 47,16-21 0,10-1-862,5 21 1,6 5 890,0-2 0,6-3 0,0 1-567,-13 5 0,1-1 0,1 1 1,1 0 537,7-2 0,1-1 0,2 1 1,0 0-432,-6 2 0,0 0 0,2 0 0,0 0 0,1 1 400,-6 1 0,1 0 0,0 0 0,0 0 1,2 0-1,-1 1-234,4-2 0,2 1 0,0-1 0,0 1 0,-1 0 0,-2 0 224,2 0 0,-1 0 0,-2 1 0,2 0 0,2-1-87,-8 2 1,1-1 0,1 1 0,1-1 0,1 1 0,0-1 0,0 0 93,3-1 1,1 0 0,1 0 0,-1 0 0,1-1 0,1 1-1,-1 0-16,-6 1 0,0 0 0,0 0 0,1 0 0,0 0 1,0-1-1,0 1 0,2-1 13,-2 1 1,1 0-1,1-1 1,0 0 0,0 0-1,0 0 1,-1 1 0,0-1-1,-3 1 3,6-1 0,-1 0 0,-1 1 0,-1-1 0,-1 1 0,1-1 0,0 1 7,-2 0 0,0 0 0,1 0 1,-2 0-1,1 0 0,0 1 1,-1-1-9,7-1 1,1 0-1,-2 1 1,1-1-1,-1 1 1,0 0-17,-2 0 1,-1 1-1,0 0 1,-1 0 0,0 1-1,0 0-24,7-2 1,0 2-1,-1-1 1,-1 1 0,-1 1-65,-4 0 1,-1 1 0,-1 0-1,-1 1 1,-1 0-146,6 0 1,-2 0 0,-1 1 0,-2 1-1247,6 0 0,-3 0 0,-3 1 1488,5 1 0,-8 1 0,4 1 0,-32 1 0</inkml:trace>
+  <inkml:trace contextRef="#ctx0" brushRef="#br0" timeOffset="20124">15235 3872 8875,'-32'-47'467,"0"-1"0,3 6 0,7 7-226,16 21-376,3 7 488,20 6 806,16 8-588,-1-1 1,5 3-957,11 4 1,4 3 559,-8-3 1,3 0-1,2 2-736,7 2 0,3 1 0,2 0 664,-10-3 1,2 1 0,1 0 0,0 0-8,5 2 1,2 0 0,0 0 0,1 0-50,-10-2 0,2-1 0,-1 1 0,1 1 0,1-1-452,1 2 1,1 0 0,1 0-1,-1 0 1,1 1 424,2 1 0,1 0 0,0 1 0,-1 0 1,-2-1-345,2 1 1,-3 0-1,0 0 1,5 3 343,-14-5 0,3 1 0,2 2 0,1 0 0,0 1 0,-3-1 0,-2-1-14,4 2 1,-3-1 0,-1 0 0,1 1-1,4 2-8,-4-2 1,4 1-1,1 2 1,0 0-1,1 0 1,-2 0-1,-2-1-129,1 1 1,-1-1-1,-2 1 1,0-1-1,0 1 1,0 0 123,1 0 1,0 1-1,0 0 1,0 0-1,0 0 1,0-1-44,0 1 0,1 0 1,-1 0-1,0 0 0,0-1 1,0 1-3,-1-1 1,1 0 0,0 0-1,-1-1 1,1 1 0,-1-1-126,-2 0 1,1-1-1,0 0 1,-1 0-1,0 0 1,-1-1-811,7 4 0,-1-1 0,0-1 0,-1 0 1,-3 0 976,4 0 0,-2 0 0,-2-1 1,-5-2-1,17 8 0,-9-5 0,1 1 1</inkml:trace>
+  <inkml:trace contextRef="#ctx0" brushRef="#br0" timeOffset="20734">15097 3564 13232,'40'26'14,"-1"0"1,0 0 0,2 8 0,1 5 0,-1 1 0,-5-1 80,-7-3 1,-4-1-1,1 2-857,10 11 0,2 4 0,0 0 868,-11-13 1,1 1-1,-1 0 1,0-1-206,7 10 0,0-1 0,3 3 303,-3-4 1,2 3-1,1 1 1,0 0-353,-6-9 1,0 1 0,0 0 0,1 1 0,0-1 255,1 2 1,1 1 0,0 0-1,0 0 1,0 0 19,2 2 1,-1 1 0,1 0 0,0 0 0,1 1-248,-6-7 0,0 1 1,0 0-1,0 1 1,1-1-1,-1 1 202,2 2 0,0 0 0,-1 1 0,1 0 0,0 0 1,0 0-139,1 3 0,0-1 0,0 2 0,0-1 0,0 1 0,0-1 102,-4-5 0,0 0 0,0 0 0,0 1 1,0-1-1,0 1 0,-1-1-66,1 1 0,-1 0 0,1 1 0,-1-1 0,1 0 0,-1 1 0,0-1 57,-1 0 1,0 0-1,1-1 1,-1 1-1,-1 0 1,1 0-1,-1-1-2,4 7 1,-1-1-1,0 0 1,0 1-1,-1-2 1,0 1-25,-1-3 0,0 0 0,-1 0 0,1-1 0,-1 0 0,0-1-91,3 6 1,1 0 0,-1-1 0,0 0-1,0-1-858,-1-4 1,-1 1 0,1-2-1,-2 0 1,0-3 936,3 3 0,-2-1 0,0-2 0,-3-4 0,10 15 0,-4-7 0,2 2 0</inkml:trace>
+  <inkml:trace contextRef="#ctx0" brushRef="#br0" timeOffset="22217">22544 1744 13010,'17'-58'955,"1"-1"1,0 1-1,-1 6 1,0 0-1,1 1-429,-1 4 1,1 0 0,-1 2 75,4-6 0,-3 4-78,-5 13 0,-3 3 330,0-6-1056,-9 21 108,-5 24 156,-6 30-43,1-2 1,-1 7-433,2-4 0,0 3 0,1 2 388,-2 11 1,0 3 0,1 2-750,2-10 1,1 2-1,0 1 1,0 0 320,1 3 1,0 1 0,0 1 0,1 1-788,1-3 0,0 1 0,0 2 0,1-3 0,0-3 379,-1 12 0,0-5 0,2 2-49,0-4 0,1 4 0,0-3 0,0-6 104,2 5 0,1-4 806,1 8 0,0-4 0,1 3 0,-3-26 0</inkml:trace>
+  <inkml:trace contextRef="#ctx0" brushRef="#br0" timeOffset="22734">22738 1240 10891,'55'-26'-32,"0"0"1,1-1 0,-16 5 0,-2 1 0,5 5 161,9 7 0,7 4 0,-1 3 0,-6 0-1483,6-1 0,-1 1 1410,-3-1 0,8-1 1,1 1-1,-5-1-547,0 0 1,-2 0-1,2-1 453,-5 1 1,2 0 0,1-1 0,2 0 2,-7 0 0,2 0 1,0 0-1,0 0 1,-3 0 33,4-1 0,-2 1 0,-1 0 0,1-1 32,5 1 0,0-1 0,-1 0 0,-5 1 35,12-2 1,-5 2 282,3-2 0,-4 1 773,-19 2 1,-3 0-192,3-2 1,-2 1 775,10-2-540,-22 1-1174,-15 4 1199,-7 5-1008,0 9-920,2 31 819,-2-3 73,-2 17 0,-3 3-415,1-26 0,-3 2 345,-1 12 1,-2 7 0,-1-2-30,1-9 0,0-2 0,-1 3-513,-2 12 1,0 3-1,0 1 475,1 0 1,0 1 0,0 2-16,2-6 1,0 2-1,0 0 1,1-4-8,0-2 0,0-3 1,0 2-11,-1-1 1,1 3 0,-2-1 0,-2-2-549,-5 2 1,-2-3-1,0-2 552,4-6 1,0-3 0,-5 2-2,-4-1 1,-5 3-1,-1-3 1,-1-6 484,-12 0 1,-3-5-442,1-1 1,-5 0-1,3-5-2,-5-4 1,-2-5 11,7-7 0,-6-2 0,-1-2 0,6 0-17,-8-1 0,-3-3 1,9-2 0,-7-1 0,-3-1 0,1-1 0,7-1-18,-6-3 0,5-2 1,-3-1-53,-1 0 0,-5-2 1,2 0-1,5 0-79,6 1 1,5-1 0,0 0-1026,-4-3 1,0-1 0,5 1 1144,2-1 0,5 1 0,3 2 0,3 1 0,0-1 0</inkml:trace>
+  <inkml:trace contextRef="#ctx0" brushRef="#br0" timeOffset="23383">23537 1930 16387,'-40'-18'59,"-1"1"1,4 3 0,9 11-15,22 44-23,5-7 6,3 13 17,12 6 0,1-7-26,-3-14 1,-1 0 14,8 14-1,-4-8 6,-5-8 146,-6-9 73,-2-7 755,-18 4-783,1-9-39,-13 1 0,-6 1-68,-22 0-93,13-3 1,-1 0-25,-16 0-143,23-3 0,2-2-2211,3-1 2348,0-4 0,25 1 0,10-3 0</inkml:trace>
+  <inkml:trace contextRef="#ctx0" brushRef="#br0" timeOffset="23584">24115 2030 16740,'-3'-3'4021,"0"0"-2979,3 3-1009,-23 21-156,15 17-560,-6-5 0,0 4-4233,7 5 1,2 0 4023,0-9 0,-1-3 0,-4 15 0,6-33 0</inkml:trace>
+  <inkml:trace contextRef="#ctx0" brushRef="#br0" timeOffset="24651">20329 6111 13103,'24'-37'1308,"1"0"0,0 0 0,10-15 0,0 5-723,-8 19 0,-1 3 633,19-15-720,-14 16-430,-16 13 86,-11 15 273,-16 29-338,2-2-39,-3 5 1,-3 5-676,2-3 0,0 1 628,-5 13 0,-1 4-54,0 3 1,1 2-70,7-18 1,0 1-1,2-1-164,0 1 0,1 0 1,2 0-302,-2 19 0,3-2-95,2-8 0,3-5 433,2-12 1,1-5 5,3 2-694,0-36-135,0-33 975,-3 4 0,0-6 182,-1-3 1,0-5 0,0 3-31,0-6 0,-1-1 98,-1-1 0,1-3 0,-1 3 217,0-3 1,1 1-103,1 11 1,1-2 0,0 0-72,2-16 0,2 1 13,2 5 1,1 2-112,2 4 0,1 1-71,2 2 1,4 1-28,4 2 0,5 2-12,6 1 1,5 2 5,8 2 1,5 3 0,-11 12 0,1 1 0,2 2-520,4 0 1,2 2-1,1 1 501,3 1 1,2 1 0,0 0 8,2 2 1,1 0 0,0 1 1,0 0 1,0 0 0,1 2 7,-1-1 0,0 1 0,-1 0-11,-1 0 0,0 0 0,0 0-4,-2 1 0,1-1 1,-1 1 6,0 0 1,0 0 0,-1 1 3,-1 0 0,0 1 1,0 0-94,-3 1 1,0 1 0,0 0 105,1 1 1,0 1-1,-4 0 1,0 0 1,-3 1-1,5 2 1,-7 3 2,-12 4 1027,-1 6-948,-16 5 739,-7 7-700,-3 9 73,1 12 1256,1 13-1386,0-25 1,0 2-28,2 6 0,2 4 13,1-5 0,1 3 0,0-3-308,2 6 1,0-1 271,2 0 1,1 3-1,-1-2 26,0 2 0,0 0-11,-5-10 0,0 2 1,-2 0 4,-1 19 0,-6 0-11,-9-15 1,-4 1 0,-1-4-18,-2 3 0,-3-2-16,-5-3 0,-6 1 0,-1-5-21,-8 1 1,-3-3-565,4-6 0,-3 1 0,-1-3 590,-3 0 1,-3-3 0,-3-1 5,2-6 1,-3-1 0,-2-2 0,2-1 5,3-2 1,1-2-1,0 0 1,-1-2-5,1 0 0,0-1 0,0-1 1,0-1 7,-1-2 1,0-1-1,1-2 1,0 0 2,-7 0 1,1-2-1,-2 0-13,4-1 1,-2 0 0,-1-1 0,0 0-23,1-1 1,0 0-1,-1-1 1,-1-2-187,4 0 1,-1-1 0,-1-2 0,2 1 0,4 0-710,-11-2 1,4 1 0,-2-3 907,1-2 0,-4-2 0,4 0 0,11 3 0,-11-5 0,20 4 0,1 0 0</inkml:trace>
+  <inkml:trace contextRef="#ctx0" brushRef="#br0" timeOffset="25100">21300 5929 17059,'-4'-4'2397,"2"1"-246,2 3-2101,-45-45-28,16 35-14,-5-11 1,0 3-65,-5 26-89,7 7 21,11 2 68,12 6 68,10 13-1,5-9 45,15 18-23,2-20 1,3-2-23,18 17-4,-11-16 1,6 2 0,-3-3-1165,2-1 0,-1-2 1157,9 5 0,-1 0-14,-8-5 0,-6 0 9,1 6 100,-10 5 39,-35-6-27,-31-5-35,-6-11 1,-3-3-465,14-2 1,-1-1 404,-2-3 0,-2-1 0,2-2-55,3-1 0,2-4-1321,-9-7 0,2-2-1393,-5-8 2247,17-12 1,30 26-1,2-1 1</inkml:trace>
+  <inkml:trace contextRef="#ctx0" brushRef="#br0" timeOffset="25624">21739 6028 20660,'-2'-40'93,"0"0"1,1 1-1,5 11 25,8 22-1,11 1-89,1 3-11,14 7-17,-5 1-11,21 13 11,-2 5-34,-14-3 1,0 2-26,-9-2 0,-2 1-454,0 4 1,-6 2 445,-6 19 84,-16-12 117,-32 11 1,-3-21-62,-12 5 89,18-19 0,-1-2 191,-5-3 34,-10 1-79,27-7 728,10-1-996,6 0-399,3 1 376,12 5 33,9 5-22,21 9-50,10 7-330,-24-10 0,0 0 307,15 11-123,-6 6-191,-35-2-358,-29 1-59,-8-14 1,-9-3-1320,3-6 0,-3-2 0,-1-1 2095,0-1 0,-1 0 0,4-1 0,-7 0 0,6 0 0,-11-2 0</inkml:trace>
+  <inkml:trace contextRef="#ctx0" brushRef="#br0" timeOffset="26541">18291 9085 13469,'14'-42'1758,"0"-1"1,1 1-1,0 4-94,7 3-936,0 3-17,1 1 46,-8 13-118,-6 3-393,-4 4 297,-4-10-347,-5 0-95,-3-13-51,-2-2-5,1-5-22,3-2-18,6 1 23,7 3 0,6 3-22,2 3 22,1 4 11,-4 1-28,-2 0-5,-1-5 27,0-2 85,3-6-68,-5 16 6,1 2-39,-5 17-235,-3 3 72,2 11 163,-1 18-6,-1 30-3,0-13 1,0 5-594,-3-7 0,-1 2 0,0 2 588,-2 7 1,0 2 0,-2 2-1,-1 5 1,-2 2 0,0 0-2,2-13 1,-1 0 0,1 0 0,-1 1-422,1-1 0,0 1 0,0-1 0,0 1 357,1-3 0,1 0 1,-1 0-1,1 3-680,1 8 0,0 4 0,1-1 0,-1-4-888,1 0 0,0-4 0,1 1 1630,0 11 0,0 1 0,0-11 0,0 5 0,1-20 0</inkml:trace>
+  <inkml:trace contextRef="#ctx0" brushRef="#br0" timeOffset="27291">18781 8069 13093,'-1'-4'-2235,"0"0"1832,1 4 252,82-22-1046,-48 19 1,3 1 1259,11-3 1,6-3-1,-1 4-285,-8 5 0,-1 2 0,1 1 526,4-1 1,2 0-1,0 1-18,2-1 0,1 0 0,1 0-27,1-1 1,0 0-1,1-1-4,0 0 1,0 0 0,0 0-21,-1-1 0,1-1 1,-2 0-35,0 0 1,0 0 0,-1-1-10,-1 0 1,-1 0-1,0 0 2,-2 0 0,-1-1 1,0 1-37,-2 0 1,-1 0 0,-1 1-28,18-1 1,-1 1-9,-6 0 1,-3 1-94,-5 0 1,-2 1-219,-5 0 0,-1 1 182,-3 0 1,0 1 5,-2 2 0,-1 0 19,1 1 1,0 1 404,-2 0 0,0 1-352,26 7-72,-14-1 1581,-18-3-1285,-14 0 1038,-10 3-869,-4 7 485,-2 9-659,0 11-28,0 10-33,2 9-309,2-25 1,1 0 181,0 5 1,1 0 2,2 3 1,0 1 13,0 3 1,0 0 30,1 2 0,0 1-393,-1 2 1,1 1 406,0 3 1,0 1-9,1 4 0,0 3-85,-1-18 1,0 2 0,1 0-570,0 6 0,2 0 1,-1 1 524,2 4 0,0 1 0,0 1-490,-2-13 1,0 0-1,0 0 1,-1 1 461,0-1 0,0 1 0,-1-1 0,-1 1 16,0 13 1,0 1 0,-4-2-231,-3-4 1,-2 0-1,-3-3 251,-2-5 1,-2-2-1,-4-2-26,-3-5 1,-4-3 0,-2-3 66,-16 10 0,-5-7-19,-5-6 0,-5-6-9,-3-6 1,-3-6-36,18-6 0,-1-2 0,0-3-14,-2-1 1,0-3 0,0-1-29,-2-1 1,0-1-1,0-1 34,-1-2 1,-1 0 0,1 0 1,-1-1 0,-1 0 1,-1 0-117,1 0 1,-3 0-1,0 0 1,4 0 113,-1 1 0,4 0 1,-4-1-6,-7 0 1,-4-1 0,-1-1 0,4 1-190,-3 0 0,2 0 0,-2-1 178,4 1 1,-2-1 0,-1 0 0,0 0-226,3 0 0,1-1 0,-1 0 0,2 0-139,4 0 1,1 0 0,1-1-1,2-1-2122,-8-4 0,3-2 0,3 0 2495,-6-6 0,8-1 0,-5-7 0,32 13 0</inkml:trace>
+  <inkml:trace contextRef="#ctx0" brushRef="#br0" timeOffset="28051">19629 9038 19546,'-12'-49'726,"0"-1"0,-4 2 0,-3 10-591,-14 17-5723,-9 7 5588,14 9 1387,-8 12-1511,2 13 928,7-1-911,2 29 85,27-14 28,4 8 33,28 3-11,13-8-178,-12-13 1,4 2 152,13 4 0,1 1 1217,-9-5 1,-2-1-1235,3 4 0,-5-2 14,-4 6 56,-24 0 34,-32-8-54,-9-7 1,-7-2-15,-3-3 0,-5-3-701,-14 0 1,-1-2 681,16-5 0,1-3-37,-8-3 1,1-3-166,15-1 1,2-3-4718,-6-6 1,2-1 3159,-3-6 0,16 0 0,21 18 1</inkml:trace>
+  <inkml:trace contextRef="#ctx0" brushRef="#br0" timeOffset="29383">21838 6039 16975,'-1'-46'472,"-1"1"0,3 3 1,7 8-272,30 15-61,9 5-84,-7 7 18,16 6-74,-22 10 0,11 11 5,-21 14 18,-8 14-23,-13 14-14,-7-25 0,-4 2-330,-3 1 1,-3 1 334,-3 1 1,-2-2 8,-1-1 0,-1-1 20,0-4 0,-1-1 47,0-3 1,0-2-8,0-3 1,1-1 303,-21 15 28,4-9-134,6-6-185,7-7-79,11-4 129,8-5 185,19-2-123,24-3-448,17-2 0,7-2-561,-15-1 0,4 0 293,9 0 1,8-1 0,-3 1-469,-15 0 0,-2 0 0,2 1 999,14-1 0,2 0 0,-6 0 0,-5 1 0,-5 0 0,-10 0 0,1 1 0</inkml:trace>
+  <inkml:trace contextRef="#ctx0" brushRef="#br0" timeOffset="30417">20178 9204 10808,'-11'3'6867,"3"-2"-6173,8-1 1513,0 0-2218,-27-39 28,27 23-51,4-42 29,22 42 16,2 2 0,2 0 12,12-1-7,12-3 7,-6 4-46,3 5-5,-19 4-5,11 8-12,-15 7-11,10 10 0,-1 8-134,4 16 78,-17-12-90,-1 17 112,-21-16 135,-10 9 112,-19 6 5,-14-9-83,3-7 44,2-14 118,13-14 67,4-2-129,3 0-566,10-2 399,21 0 32,11 4-38,21 5-17,-10 3 0,1 3-1,19 8-137,-14-3 1,-1 3 131,-14-5 1,-2 0-26,6 4 0,-2 2-154,14 19 106,-23-7-431,-56-6-804,4-20 1,-4-5-1167,-8 1 1,-2-3 2490,-8-6 0,5-1 0,6 0 0,2-2 0</inkml:trace>
+  <inkml:trace contextRef="#ctx0" brushRef="#br0" timeOffset="33175">26596 1942 20677,'-47'-8'-185,"12"-1"-372,13 48 0,5 17-2286,2-14 1,0 1 2842,-4 18 0,2-1 0,6-24 0,2-3 0,-6 28 0</inkml:trace>
+  <inkml:trace contextRef="#ctx0" brushRef="#br0" timeOffset="33868">27021 2143 18705,'-50'-31'418,"0"0"1,10 1-1,5 12-289,-8 46-67,18 7-40,11-3 1,2 3-18,0 27-192,13-24 0,5-2 171,9 8 10,21 1 90,2-19-90,1-2-8,-5-15 0,0-4-203,4-10 257,14-2 88,-28-16 1,-17-5 243,-7-9-199,-23-16-16,-5 8-51,-6 1 135,3 7 236,15 12-410,7-5-72,24 6-12,13 12 0,6 4 8,5 2 1,2 2-432,3-1 0,2 2 414,5 3 1,0 1-17,-5 3 0,-1 0 31,-7-2 0,-2 2-73,5 4 0,-7 2 11,-16 2 84,-3 4 57,-30 3 32,-31 10-27,-7 2-216,17-10 0,2 0 160,-11 15 809,18-8-826,19 8 22,22-6-8,7-8 0,5 0 3,2-5 0,2-1-685,10 1 1,0-3 683,14-1 365,2-9-241,-22-12 23,2-10 33,-12-25-140,-13 9 14,-10-4 0,-4-1-19,-3 1 58,-7-5 0,-2-1 53,-10-4-103,7 16 0,-2 0 8,-12-9-44,4 10-40,9 11 1020,1 6-1306,9 13-2317,-12 21-3082,6 10 5702,-4 13 0,9-17 0,6-10 0</inkml:trace>
+  <inkml:trace contextRef="#ctx0" brushRef="#br0" timeOffset="34100">28058 2101 15149,'0'-5'4968,"0"2"-3904,0 3-1047,-23 26-57,17 8 1,2 4-34,-9-8 1,1 1-253,8 21 0,4 0-1063,0 3 52,0-21 0,0-1-7123,3 24 8459,2-15 0,0-18 0,-1-13 0</inkml:trace>
+  <inkml:trace contextRef="#ctx0" brushRef="#br0" timeOffset="34351">28433 2279 11172,'0'-7'6262,"0"2"-5036,0 5-631,0 0-276,-80-49-179,47 43 39,-7-3 0,-9 0 1,9 7-353,-1 26 461,-5 7 1,0 3-1405,0 9 1160,18-18 1,3 3 12,11 3 0,9-1 50,22 12-85,4-11 1,6-2-561,14-5 1,6-4 226,9 0 0,4-2-307,-16-6 0,1-1 1,1-1-1454,2 0 1,0-1-1,-1 0 2071,15 1 0,-4-1 0,-19-2 0,-4-2 0,4 1 0</inkml:trace>
+  <inkml:trace contextRef="#ctx0" brushRef="#br0" timeOffset="35375">23524 6378 22060,'-1'-14'-61,"-7"21"-85,-14 50-249,9-20 0,-1 2-1945,-2 6 0,-1 1-2118,1 2 0,0 1 4458,2-6 0,1-4 0,-3 13 0,8-26 0</inkml:trace>
+  <inkml:trace contextRef="#ctx0" brushRef="#br0" timeOffset="36067">23686 6715 17988,'9'-52'1432,"0"0"0,-2 5 1,-6 9-1215,-12 18-162,-9 9-39,-7 14-11,-4 12 11,0 14-12,3 10-27,10 8-79,11 14 56,8-18-16,15 13 44,7-26 28,10 2 23,3-13 66,5-13-60,-15-9 38,1-15 6,-15-6-6,-3-13-27,-7-7-12,-9-3 28,-4-1 23,-2 3-17,5 4-51,12 4-16,15 5-12,20 5-28,17 8 12,-24 13 0,1 3-9,-1 2 0,0 3-47,21 8-23,-13 7-17,-12 13 79,-14-9-6,-5 13 45,-13-8 11,-7 11 17,-7 3-5,-5 5-18,1 0 1,7 0 11,8-2-6,14-4 11,9-4 29,11-8 72,9-9-22,-4-11-62,-1-8 45,-3-14 28,-9-8 56,0-24-95,-10-3-40,-10-2 23,-11-7 23,-4 14 22,-8-9 27,2 10-38,3 12-168,4 11-29,7 11-195,2 8-197,1 13-1948,-3 18 817,2-5-7595,0 26 9225,9-26 0,-1 3 0,2-18 0</inkml:trace>
+  <inkml:trace contextRef="#ctx0" brushRef="#br0" timeOffset="36268">24455 6662 23321,'-6'-46'-106,"0"13"-6,-10 88-84,6-20-253,1 1 1,-1 2-1451,2-4 0,0 0-1330,0 0 0,-1-1 2378,1 2 1,0-5 0,0 0 0,4-16 0</inkml:trace>
+  <inkml:trace contextRef="#ctx0" brushRef="#br0" timeOffset="36518">24655 6759 20258,'-44'-12'259,"0"0"0,1 0 0,-17-3 0,8 10-91,7 32 179,14 6-251,15 4-24,12 4 40,8-7-68,28 20-60,-8-25-139,12 3 1,3-2-104,0-5-1086,7 0 0,3-1-8487,6-1 8838,-23-10 0,-2-2 0,1-1 0,-23-8 0</inkml:trace>
+  <inkml:trace contextRef="#ctx0" brushRef="#br0" timeOffset="37234">22413 9555 16454,'2'-7'3977,"-1"2"-2471,-1 5-1276,0 0-118,-2 5-212,-15 31-512,-7 17-502,6-12 0,0 4-2445,4-1 0,1 0 3559,4-5 0,1-4 0,1 10 0,7-22 0</inkml:trace>
+  <inkml:trace contextRef="#ctx0" brushRef="#br0" timeOffset="37917">22716 9743 19451,'11'-52'922,"-1"-1"0,0 5 1,-6 10-806,-10 21-145,-3 10 23,-4 16 5,-3 13-11,-3 16-40,1 12-33,5 5-6,8 1 28,10-4 17,8-7 23,5-9 89,1-12 231,-4-10-24,-6-12-229,-3-11-11,-3-11-6,0-2 72,-9-25-60,0 20 38,-3-4 0,-1-1 12,-1-4-34,-1-14-67,14 16-17,15 6-45,26 4 45,-7 10 17,26 4-23,-20 10-39,8 7-39,-8 5 6,-13 9 95,-12 6 16,-14 6 12,-11 6-11,-5 4 5,-1 3-11,5 0 0,11 0 11,11-5 12,12-4-7,12-8 1,-5-9 67,24-6-5,-17-10 27,20-9 17,-14-10 23,-1-11-73,-14 1 11,-6-2 352,-11-25-206,-14 12-132,-4 7 0,-4 1 104,-28-12-138,14 23 0,-3 2 9,-27-15-45,3 9-67,11 10-84,13 8-157,8 12-471,5 9-21,5 5-5300,1 21 6072,14-6 0,-6-3 0,7-11 0</inkml:trace>
+  <inkml:trace contextRef="#ctx0" brushRef="#br0" timeOffset="38141">23697 9705 22918,'2'-40'666,"0"-1"1,2-22-897,-4 62 219,-1 7 5,-1 8-167,-5 19-264,-1-2 0,-2 4-348,-1 2 1,0 2-4132,-7 22 1,1-1 2371,6-22 1,1-2 2543,-1 10 0,1-6 0,6-16 0,2-3 0</inkml:trace>
+  <inkml:trace contextRef="#ctx0" brushRef="#br0" timeOffset="38417">23936 9939 5752,'14'-52'2901,"0"0"0,-2 5 1,-3 5 335,-12 6-2879,-4 10 1102,-5 11-1415,-4 7 726,-8 12-726,-12 11 11,-10 16 1073,21-10 1,0 1-1113,-14 16 30,14-7 1,2 1 13,-1 10-116,8-10 0,2 0 78,3 13 27,16-3-44,20-4-124,0-19 0,6-3-994,11 0 0,5-2-529,11 1 0,3-1 1641,-11-5 0,1 0 0,-5-1 0,-2 0 0,-4-2 0,-3 0 0,1 0 0</inkml:trace>
+  <inkml:trace contextRef="#ctx0" brushRef="#br0" timeOffset="55466">6839 2928 13329,'-3'-45'1215,"1"0"0,-5-7 1,-4 8-746,-12 11-223,-14-15-96,-6 13-90,6 9 15,-1 6 0,-3 2-12,9 5 0,-2 0-1078,-19-8 0,-1 1 1036,15 7 1,0 0 10,-14-4 1,-4-2-4,11 5 0,-1 0 0,1-1-19,-11-2 0,-3-2-3,8 4 1,-6-3-1,-1 1 1,4 2-988,6 1 1,2 2 0,-1-1 981,-9-2 1,-2-2 0,0 2 3,4 1 1,1 1-1,-1 1 40,-1-1 0,0 2 1,-1 0-37,-1-1 0,-1 2 0,-1-1-281,10 3 1,-2-1-1,0 1 1,2 2 278,-8-1 0,1 2 1,1 1-3,-4 0 1,0 0-1,2 1-5,11 1 0,1 0 0,-3 2-7,-5 0 1,-6 0 0,1 1 0,6 1-2,-8 0 1,0 1 17,7 0 1,-7 0-1,0 2 1,2 0-3,9 2 1,2 0 0,0 1 0,1 1 9,-1-1 0,0 1 0,0 1 0,0 0 0,-3 3 1,-2 0 0,1 2 0,4 0 0,-1 5 0,3 1 0,1 1-9,3 2 1,2 1 0,1 2-24,3 1 0,2 3 0,1 0 84,2 2 0,1 2 0,1 0-27,1 4 0,1 0 0,3 0 29,-6 7 0,2 3-27,3 2 0,0 3 0,3-4 3,6-10 1,2 2-32,2 1 0,-1 8 0,2 1 0,5-5 8,5 16 0,7 0 88,0-2 1,2 4-1,4-5-183,-2-17 1,2-3 0,5 2 23,7 2 1,7 3-1,2-1 1,1-4-303,7 0 1,2-4 0,5 2 336,-8-7 1,3 3 0,3-1 0,1 0 0,0-4 2,0-2 0,1-2 0,0-2 0,2-1 0,1 1-120,4 1 0,2-1 0,0 0 1,0-1-1,-2-1 96,4 1 0,-3-1 0,2-1 0,4 0-66,-11-5 0,3 0 0,2 1 0,2-1 1,-1 0-1,-1-2 0,-3-1 97,6 0 1,-2-2 0,-1-1 0,0 0 0,2 1-6,-3 0 0,1 0 0,1 1 0,1-1 1,1-1-1,1-1 7,-4-3 0,3-1 1,2 0-1,-1-2 1,-1 1-1,-1-2 0,-4 1-5,5-1 1,-5 0-1,0-1 1,1-1-1,3 1-13,-4-1 1,3 0-1,2 0 1,0 0-1,0-1 1,-1 0 0,-3-1 14,9-2 0,-2 0 1,-1-1-1,-2-1 1,-1 0 9,0 0 0,-3 0 0,0-1 1,4-3-8,-8 1 1,4-3 0,1 0-1,0-1 1,-1 0 0,-4 0 5,8-2 1,-5 0-1,0-1 1,5-1-20,-8 2 1,3-1 0,2 0-1,0-1 1,-1 0 0,-3-1 2,1 0 0,-2 0 1,-1 0-1,0-1 1,-1-1-3,0 0 0,0 0 0,0-1 0,-2 0 1,-2 1 0,1-1 0,-3 1 0,0 0 0,2-4-5,0-3 1,2-3 0,0-1 0,-3 1 0,-5 2 11,-2 1 0,-5 2 0,2-5 5,1-4 1,4-6-1,0-3 1,-4 0 0,-6 3 171,-6-4 0,-7 1 1,0-3-163,0-1 0,1-4 1,-4 0-1,-6 1 7,-6-6 1,-9 1 0,-7 0-16,-6 7 0,-7-1 0,-3 2 0,0 4 151,0-1 0,-1 4 0,-6 1-166,1 8 0,-6-1 1,-2 1-1,-2 2 0,2 4-12,-6 1 1,2 3-1,-3 3 1,-2-1-3,-1 0 1,-3-1 0,-2 1 0,0 1-1,-2 1-1,9 2 1,-2 1 0,0 1 0,-1 0-1,-1 1 1,1 0-23,-3 1 0,-1 0 0,0 0 0,0 1 0,1 0 1,2 1-10,-1 0 1,4 0 0,-1 1-1,0 1 1,-5 0-627,4 1 1,-3 0 0,-3 1 0,0 0 0,1 0-1,3 1 1,5 0 615,-8 1 1,5 0 0,2 0 0,-2 0 0,-9 0 0,-3 0-1,4 0 1,10 1 0,9 1 0,0 0 0</inkml:trace>
+  <inkml:trace contextRef="#ctx0" brushRef="#br0" timeOffset="69049">1586 5372 13452,'-25'-42'-81,"0"0"1,3 2 0,10 8-54,19 21 369,6 12 50,-5 11 407,-1 30 0,-2 8-457,-1 8-522,-1-3 0,0 6 450,-4 1 0,2 1-111,2-21 0,2 0 0,0 0-352,-2 1 1,1 1 0,2-3 371,4 11 1,8-8 127,18-14 1,7-7 199,2-8 0,6-4-174,0-1 0,6-3 0,1-4-813,3-7 0,2-5 0,1-3 644,-9 1 1,2-2-1,-1-2 1,-1 1-410,-6 1 0,-3-1 1,1 0-1,2-2 378,-1 0 1,3-2 0,0 0 0,2-2 0,-1 0 9,5-2 0,0-1 0,0-1 0,1 0 0,0-1-188,-8 4 1,1 1 0,0-1 0,0-1-1,0 0 1,2 0 163,-3 0 1,1 0 0,1-1 0,0 0 0,0 0 0,-1 1 0,-2 0-181,11-5 0,-1 0 1,-1 1-1,-1 1 0,-3 0 175,3 0 0,-4 0 0,1 1 0,2-1-17,-8 4 0,2-1 0,2 1 0,-1-1 0,-2 2 0,-3 1 8,0 1 1,-2 1-1,-2 1 1,3-1 1,14-5 0,2-1 0,0 1 0,-6 2 3,-6 4 1,-5 2 0,-3 2-4,7-2 0,-6 3-86,9-2 147,-28 9 1667,-15 2-1460,-8 2 1646,-6-1-1858,-9-5 2102,-15-1-2180,-16-2 10,2 4-16,1 4 0,-2 4 1093,9 2 0,-1 1-1071,-18 4 1,-1 1 7,5 2 1,2 0-313,1 1 1,1-1 320,3-1 0,1-2 14,1-2 0,2-2-13,-12 1 10,-6-12 28,22-6 29,-8-8-1,6-4-5,10-2-28,10 2 1134,11 3-1168,5 5 715,5 5-749,19-4 23,15 4 0,-3 0 0,4 1-525,11 1 1,4 0 527,-10 2 1,2 1 0,1 0-662,6 1 0,1 1 1,-1 0 655,-8 0 0,-2 0 0,3 3-2,16 2 1,4 4-1,-5 2-475,-4 3 1,-3 3 472,-5-1 1,2 3-1,-7 3-190,-6 7 1,-8 5 206,-10 2 1,-7 3 523,-7 24-857,-21-8 0,-5-1-775,-6 5 939,8-18 0,-3 5 0,3-9 0,2-1 0,-7 14 0</inkml:trace>
+  <inkml:trace contextRef="#ctx0" brushRef="#br0" timeOffset="75817">2123 10243 13732,'-57'0'786,"1"0"0,3 1 0,4 0-293,-14 4-34,9-2 163,13-1-102,14-1-508,14-1-147,11 0 152,14 0 33,13 2 1,18 2-23,16 4-14,-20-3 0,1 2-636,7 0 0,2 0 638,8 2 1,1 0-490,-14-4 0,1 1 0,1 0 490,5 0 0,1-1 0,3 1-456,5 0 1,2 0 0,1-1 456,-10 0 0,0 0 0,1 0 1,1 0-436,5 0 1,0 0 0,1 1-1,1-1 432,-9 0 1,0 1 0,1-1 0,0 0 0,0 0-210,4 1 0,-1-1 0,2 1 0,-1 0 0,1-1 212,2 1 0,1 1 0,0-1 0,0 0 0,1 0-93,-9-1 1,1 1-1,0-1 1,0 0 0,0 0-1,0 1 98,2-1 0,1 1 1,-1-1-1,1 1 1,-1-1-1,1 1-72,2 0 0,-1 0 1,1 0-1,0 1 0,1-1 1,-1 1 93,2-1 1,0 1 0,0 0 0,0 0-1,1 0 1,-1 0-26,-7-1 0,-1 1 0,1-1 0,0 0 0,0 1 0,0 0 0,0-1 13,0 1 1,1 0-1,-1-1 1,1 1 0,0 0-1,1 0 1,2 1 0,1-1 0,3 1 0,1 0 1,1 0-1,-1 0 0,-1-1 1,-2 1-1,-2-1-25,1 1 0,-3-1 1,-2-1-1,0 1 1,1 0-1,5 1-4,-3-1 1,4 0 0,1 1 0,2 0 0,0 0 0,-1 0-1,-2-1 1,-4 0 11,2 0 1,-2 0 0,-3 0 0,0-1 0,2 1 0,2 0-5,-5-1 0,1 0 0,1 1 1,1-1-1,0 1 0,1-1 1,0 1-1,-1-1-1,1 1 1,0-1 0,0 0-1,0 1 1,0-1 0,0 1-1,0-1 1,1 0-3,0 0 1,0 1-1,-1-1 1,2 0-1,-1 0 1,1 0-1,2 0 1,1 0 0,-5-1 0,3 1 0,0 0 0,2-1 1,0 1-1,0 0 0,0-1 0,-2 1 1,-2-1-1,-2 0-6,6 1 1,-2-1-1,-3 0 1,0 0 0,0 1-1,3-1 1,3 0 1,-8 0 0,4 0 1,1 0-1,2 0 0,0 0 1,0 0-1,0 0 0,-2 0 1,-2 0-1,-2-1 0,6 1 0,-4 0 0,-1-1 1,-1 1-1,0-1 0,1 0 0,3 1-5,-5-1 1,1 0-1,2 1 1,0-1-1,1 0 1,0 1 0,0-1-1,0 0 1,-1 1-1,0-1 1,-1 0-1,1 0 1,0 0-1,0 0 1,0 0-1,-1 0 1,1 0-1,0-1-2,-1 1 1,0 0 0,0 0-1,0-1 1,0 1 0,0-1-1,0 1 1,-1-1 0,1 1 1,0-1 1,0 1-1,-1-1 1,1 0-1,-1 1 1,1-1-1,-1 0 1,1 0-1,-1 1 3,0-1 1,-1 0 0,1 0-1,0 0 1,-1 0 0,0 0-1,1 0 1,-1 0 0,1 1 0,6-1 0,0 0 0,-1 1 1,1-1-1,0 0 0,0 0 1,-1 1-1,1-1-6,-2 0 0,1 1 0,-1-1 0,0 0 0,1 0 0,-1 1 0,-1-1 0,1 0-20,-1 1 0,-1-1 1,1 1-1,-1-1 1,0 1-1,0-1 1,0 1-1,-1-1-125,-1 1 1,0-1 0,-1 1 0,1-1 0,-1 1 0,0 0 0,-1 0 0,1 0-796,5 0 1,0 1-1,0 0 1,0-1 0,-1 1-1,-2 0 1,-1 0 939,2-1 0,-2 1 0,0 0 0,-2-1 0,-3 1 0,-2-1 0,4 1 0,-3 0 0,-4-1 0,-4 1 0,7-1 0,-1 1 0</inkml:trace>
+</inkml:ink>
+</file>
+
 <file path=ppt/slideLayouts/slideLayout1.xml><?xml version="1.0" encoding="utf-8"?>
 <p:sldLayout xmlns:a="http://schemas.openxmlformats.org/drawingml/2006/main" xmlns:r="http://schemas.openxmlformats.org/officeDocument/2006/relationships" xmlns:p="http://schemas.openxmlformats.org/presentationml/2006/main" type="title" preserve="1">
   <p:cSld name="Title Slide">
@@ -574,7 +638,7 @@
           <a:p>
             <a:fld id="{8D1A599A-E44C-4E47-966F-BAD7BBD3E025}" type="datetimeFigureOut">
               <a:rPr lang="en-US" smtClean="0"/>
-              <a:t>3/20/26</a:t>
+              <a:t>3/26/26</a:t>
             </a:fld>
             <a:endParaRPr lang="en-US"/>
           </a:p>
@@ -772,7 +836,7 @@
           <a:p>
             <a:fld id="{8D1A599A-E44C-4E47-966F-BAD7BBD3E025}" type="datetimeFigureOut">
               <a:rPr lang="en-US" smtClean="0"/>
-              <a:t>3/20/26</a:t>
+              <a:t>3/26/26</a:t>
             </a:fld>
             <a:endParaRPr lang="en-US"/>
           </a:p>
@@ -980,7 +1044,7 @@
           <a:p>
             <a:fld id="{8D1A599A-E44C-4E47-966F-BAD7BBD3E025}" type="datetimeFigureOut">
               <a:rPr lang="en-US" smtClean="0"/>
-              <a:t>3/20/26</a:t>
+              <a:t>3/26/26</a:t>
             </a:fld>
             <a:endParaRPr lang="en-US"/>
           </a:p>
@@ -1178,7 +1242,7 @@
           <a:p>
             <a:fld id="{8D1A599A-E44C-4E47-966F-BAD7BBD3E025}" type="datetimeFigureOut">
               <a:rPr lang="en-US" smtClean="0"/>
-              <a:t>3/20/26</a:t>
+              <a:t>3/26/26</a:t>
             </a:fld>
             <a:endParaRPr lang="en-US"/>
           </a:p>
@@ -1453,7 +1517,7 @@
           <a:p>
             <a:fld id="{8D1A599A-E44C-4E47-966F-BAD7BBD3E025}" type="datetimeFigureOut">
               <a:rPr lang="en-US" smtClean="0"/>
-              <a:t>3/20/26</a:t>
+              <a:t>3/26/26</a:t>
             </a:fld>
             <a:endParaRPr lang="en-US"/>
           </a:p>
@@ -1718,7 +1782,7 @@
           <a:p>
             <a:fld id="{8D1A599A-E44C-4E47-966F-BAD7BBD3E025}" type="datetimeFigureOut">
               <a:rPr lang="en-US" smtClean="0"/>
-              <a:t>3/20/26</a:t>
+              <a:t>3/26/26</a:t>
             </a:fld>
             <a:endParaRPr lang="en-US"/>
           </a:p>
@@ -2130,7 +2194,7 @@
           <a:p>
             <a:fld id="{8D1A599A-E44C-4E47-966F-BAD7BBD3E025}" type="datetimeFigureOut">
               <a:rPr lang="en-US" smtClean="0"/>
-              <a:t>3/20/26</a:t>
+              <a:t>3/26/26</a:t>
             </a:fld>
             <a:endParaRPr lang="en-US"/>
           </a:p>
@@ -2271,7 +2335,7 @@
           <a:p>
             <a:fld id="{8D1A599A-E44C-4E47-966F-BAD7BBD3E025}" type="datetimeFigureOut">
               <a:rPr lang="en-US" smtClean="0"/>
-              <a:t>3/20/26</a:t>
+              <a:t>3/26/26</a:t>
             </a:fld>
             <a:endParaRPr lang="en-US"/>
           </a:p>
@@ -2384,7 +2448,7 @@
           <a:p>
             <a:fld id="{8D1A599A-E44C-4E47-966F-BAD7BBD3E025}" type="datetimeFigureOut">
               <a:rPr lang="en-US" smtClean="0"/>
-              <a:t>3/20/26</a:t>
+              <a:t>3/25/26</a:t>
             </a:fld>
             <a:endParaRPr lang="en-US"/>
           </a:p>
@@ -2695,7 +2759,7 @@
           <a:p>
             <a:fld id="{8D1A599A-E44C-4E47-966F-BAD7BBD3E025}" type="datetimeFigureOut">
               <a:rPr lang="en-US" smtClean="0"/>
-              <a:t>3/20/26</a:t>
+              <a:t>3/26/26</a:t>
             </a:fld>
             <a:endParaRPr lang="en-US"/>
           </a:p>
@@ -2983,7 +3047,7 @@
           <a:p>
             <a:fld id="{8D1A599A-E44C-4E47-966F-BAD7BBD3E025}" type="datetimeFigureOut">
               <a:rPr lang="en-US" smtClean="0"/>
-              <a:t>3/20/26</a:t>
+              <a:t>3/26/26</a:t>
             </a:fld>
             <a:endParaRPr lang="en-US"/>
           </a:p>
@@ -3224,7 +3288,7 @@
           <a:p>
             <a:fld id="{8D1A599A-E44C-4E47-966F-BAD7BBD3E025}" type="datetimeFigureOut">
               <a:rPr lang="en-US" smtClean="0"/>
-              <a:t>3/20/26</a:t>
+              <a:t>3/25/26</a:t>
             </a:fld>
             <a:endParaRPr lang="en-US"/>
           </a:p>
@@ -4173,8 +4237,8 @@
           </p:pic>
         </mc:Fallback>
       </mc:AlternateContent>
-      <mc:AlternateContent xmlns:mc="http://schemas.openxmlformats.org/markup-compatibility/2006">
-        <mc:Choice xmlns:p14="http://schemas.microsoft.com/office/powerpoint/2010/main" Requires="p14">
+      <mc:AlternateContent xmlns:mc="http://schemas.openxmlformats.org/markup-compatibility/2006" xmlns:p14="http://schemas.microsoft.com/office/powerpoint/2010/main">
+        <mc:Choice Requires="p14">
           <p:contentPart p14:bwMode="auto" r:id="rId5">
             <p14:nvContentPartPr>
               <p14:cNvPr id="3" name="Ink 2">
@@ -4193,7 +4257,7 @@
             </p14:xfrm>
           </p:contentPart>
         </mc:Choice>
-        <mc:Fallback>
+        <mc:Fallback xmlns="">
           <p:pic>
             <p:nvPicPr>
               <p:cNvPr id="3" name="Ink 2">
@@ -4454,8 +4518,8 @@
           </a:prstGeom>
         </p:spPr>
       </p:pic>
-      <mc:AlternateContent xmlns:mc="http://schemas.openxmlformats.org/markup-compatibility/2006">
-        <mc:Choice xmlns:p14="http://schemas.microsoft.com/office/powerpoint/2010/main" Requires="p14">
+      <mc:AlternateContent xmlns:mc="http://schemas.openxmlformats.org/markup-compatibility/2006" xmlns:p14="http://schemas.microsoft.com/office/powerpoint/2010/main">
+        <mc:Choice Requires="p14">
           <p:contentPart p14:bwMode="auto" r:id="rId3">
             <p14:nvContentPartPr>
               <p14:cNvPr id="2" name="Ink 1">
@@ -4474,7 +4538,7 @@
             </p14:xfrm>
           </p:contentPart>
         </mc:Choice>
-        <mc:Fallback>
+        <mc:Fallback xmlns="">
           <p:pic>
             <p:nvPicPr>
               <p:cNvPr id="2" name="Ink 1">
@@ -4735,6 +4799,57 @@
           </a:prstGeom>
         </p:spPr>
       </p:pic>
+      <mc:AlternateContent xmlns:mc="http://schemas.openxmlformats.org/markup-compatibility/2006">
+        <mc:Choice xmlns:p14="http://schemas.microsoft.com/office/powerpoint/2010/main" Requires="p14">
+          <p:contentPart p14:bwMode="auto" r:id="rId3">
+            <p14:nvContentPartPr>
+              <p14:cNvPr id="2" name="Ink 1">
+                <a:extLst>
+                  <a:ext uri="{FF2B5EF4-FFF2-40B4-BE49-F238E27FC236}">
+                    <a16:creationId xmlns:a16="http://schemas.microsoft.com/office/drawing/2014/main" id="{A00D0755-F828-2CD5-5BB1-1C4C443CB9E6}"/>
+                  </a:ext>
+                </a:extLst>
+              </p14:cNvPr>
+              <p14:cNvContentPartPr/>
+              <p14:nvPr/>
+            </p14:nvContentPartPr>
+            <p14:xfrm>
+              <a:off x="540720" y="326160"/>
+              <a:ext cx="9798840" cy="3857760"/>
+            </p14:xfrm>
+          </p:contentPart>
+        </mc:Choice>
+        <mc:Fallback>
+          <p:pic>
+            <p:nvPicPr>
+              <p:cNvPr id="2" name="Ink 1">
+                <a:extLst>
+                  <a:ext uri="{FF2B5EF4-FFF2-40B4-BE49-F238E27FC236}">
+                    <a16:creationId xmlns:a16="http://schemas.microsoft.com/office/drawing/2014/main" id="{A00D0755-F828-2CD5-5BB1-1C4C443CB9E6}"/>
+                  </a:ext>
+                </a:extLst>
+              </p:cNvPr>
+              <p:cNvPicPr/>
+              <p:nvPr/>
+            </p:nvPicPr>
+            <p:blipFill>
+              <a:blip r:embed="rId4"/>
+              <a:stretch>
+                <a:fillRect/>
+              </a:stretch>
+            </p:blipFill>
+            <p:spPr>
+              <a:xfrm>
+                <a:off x="531360" y="316800"/>
+                <a:ext cx="9817560" cy="3876480"/>
+              </a:xfrm>
+              <a:prstGeom prst="rect">
+                <a:avLst/>
+              </a:prstGeom>
+            </p:spPr>
+          </p:pic>
+        </mc:Fallback>
+      </mc:AlternateContent>
     </p:spTree>
     <p:extLst>
       <p:ext uri="{BB962C8B-B14F-4D97-AF65-F5344CB8AC3E}">
